--- a/public/plans/2026-05-25.pptx
+++ b/public/plans/2026-05-25.pptx
@@ -8972,7 +8972,7 @@
                 </a:solidFill>
                 <a:latin typeface="Calibri"/>
               </a:rPr>
-              <a:t>Ages 3–5  ·  45 minute session</a:t>
+              <a:t>Ages 3–5 · 45 minute session</a:t>
             </a:r>
           </a:p>
         </p:txBody>
@@ -9189,7 +9189,7 @@
                 </a:solidFill>
                 <a:latin typeface="Calibri"/>
               </a:rPr>
-              <a:t>COACH PLAYBOOK · PRE-K &amp; K</a:t>
+              <a:t>COACH PLAYBOOK · PRE-K &amp; KINDERGARTEN</a:t>
             </a:r>
           </a:p>
         </p:txBody>
@@ -12131,7 +12131,7 @@
                 </a:solidFill>
                 <a:latin typeface="Calibri"/>
               </a:rPr>
-              <a:t>qmtk Soccer · Coach Playbook · Pre-K &amp; K</a:t>
+              <a:t>qmtk Soccer · Coach Playbook · Pre-K &amp; Kindergarten</a:t>
             </a:r>
           </a:p>
         </p:txBody>
@@ -12348,7 +12348,7 @@
                 </a:solidFill>
                 <a:latin typeface="Calibri"/>
               </a:rPr>
-              <a:t>COACH PLAYBOOK · PRE-K &amp; K</a:t>
+              <a:t>COACH PLAYBOOK · PRE-K &amp; KINDERGARTEN</a:t>
             </a:r>
           </a:p>
         </p:txBody>
@@ -14088,7 +14088,7 @@
                 </a:solidFill>
                 <a:latin typeface="Calibri"/>
               </a:rPr>
-              <a:t>qmtk Soccer · Coach Playbook · Pre-K &amp; K</a:t>
+              <a:t>qmtk Soccer · Coach Playbook · Pre-K &amp; Kindergarten</a:t>
             </a:r>
           </a:p>
         </p:txBody>
@@ -14305,7 +14305,7 @@
                 </a:solidFill>
                 <a:latin typeface="Calibri"/>
               </a:rPr>
-              <a:t>COACH PLAYBOOK · PRE-K &amp; K</a:t>
+              <a:t>COACH PLAYBOOK · PRE-K &amp; KINDERGARTEN</a:t>
             </a:r>
           </a:p>
         </p:txBody>
@@ -17009,7 +17009,7 @@
                 </a:solidFill>
                 <a:latin typeface="Calibri"/>
               </a:rPr>
-              <a:t>qmtk Soccer · Coach Playbook · Pre-K &amp; K</a:t>
+              <a:t>qmtk Soccer · Coach Playbook · Pre-K &amp; Kindergarten</a:t>
             </a:r>
           </a:p>
         </p:txBody>
@@ -17226,7 +17226,7 @@
                 </a:solidFill>
                 <a:latin typeface="Calibri"/>
               </a:rPr>
-              <a:t>COACH PLAYBOOK · PRE-K &amp; K</a:t>
+              <a:t>COACH PLAYBOOK · PRE-K &amp; KINDERGARTEN</a:t>
             </a:r>
           </a:p>
         </p:txBody>
@@ -19621,7 +19621,7 @@
                 </a:solidFill>
                 <a:latin typeface="Calibri"/>
               </a:rPr>
-              <a:t>qmtk Soccer · Coach Playbook · Pre-K &amp; K</a:t>
+              <a:t>qmtk Soccer · Coach Playbook · Pre-K &amp; Kindergarten</a:t>
             </a:r>
           </a:p>
         </p:txBody>
@@ -19951,7 +19951,7 @@
                 </a:solidFill>
                 <a:latin typeface="Calibri"/>
               </a:rPr>
-              <a:t>Ages 6–11  ·  60 minute session</a:t>
+              <a:t>Ages 6–11 · 60 minute session</a:t>
             </a:r>
           </a:p>
         </p:txBody>
